--- a/Presentation/SolarFlarePhenomena.pptx
+++ b/Presentation/SolarFlarePhenomena.pptx
@@ -3730,8 +3730,8 @@
         </p:nvSpPr>
         <p:spPr>
           <a:xfrm>
-            <a:off x="777240" y="5828647"/>
-            <a:ext cx="347472" cy="316121"/>
+            <a:off x="777240" y="5473151"/>
+            <a:ext cx="539496" cy="671618"/>
           </a:xfrm>
           <a:prstGeom prst="rect">
             <a:avLst/>
@@ -3762,8 +3762,8 @@
         </p:nvSpPr>
         <p:spPr>
           <a:xfrm>
-            <a:off x="630936" y="6254496"/>
-            <a:ext cx="685800" cy="182880"/>
+            <a:off x="646838" y="6254496"/>
+            <a:ext cx="800299" cy="182880"/>
           </a:xfrm>
           <a:prstGeom prst="rect">
             <a:avLst/>
@@ -3779,7 +3779,7 @@
               <a:buNone/>
             </a:pPr>
             <a:r>
-              <a:rPr lang="en-US" sz="750" dirty="0">
+              <a:rPr lang="en-US" sz="1100" dirty="0">
                 <a:solidFill>
                   <a:srgbClr val="BBD0E5"/>
                 </a:solidFill>
@@ -3789,7 +3789,7 @@
               </a:rPr>
               <a:t>Quakes</a:t>
             </a:r>
-            <a:endParaRPr lang="en-US" sz="750" dirty="0"/>
+            <a:endParaRPr lang="en-US" sz="1100" dirty="0"/>
           </a:p>
         </p:txBody>
       </p:sp>
@@ -3801,8 +3801,8 @@
         </p:nvSpPr>
         <p:spPr>
           <a:xfrm>
-            <a:off x="1737360" y="6015446"/>
-            <a:ext cx="347472" cy="129322"/>
+            <a:off x="1737360" y="5684955"/>
+            <a:ext cx="539496" cy="459813"/>
           </a:xfrm>
           <a:prstGeom prst="rect">
             <a:avLst/>
@@ -3833,7 +3833,7 @@
         </p:nvSpPr>
         <p:spPr>
           <a:xfrm>
-            <a:off x="1591056" y="6254496"/>
+            <a:off x="1664208" y="6254496"/>
             <a:ext cx="685800" cy="182880"/>
           </a:xfrm>
           <a:prstGeom prst="rect">
@@ -3850,7 +3850,7 @@
               <a:buNone/>
             </a:pPr>
             <a:r>
-              <a:rPr lang="en-US" sz="750" dirty="0">
+              <a:rPr lang="en-US" sz="1100" dirty="0">
                 <a:solidFill>
                   <a:srgbClr val="BBD0E5"/>
                 </a:solidFill>
@@ -3860,7 +3860,7 @@
               </a:rPr>
               <a:t>Volcanoes</a:t>
             </a:r>
-            <a:endParaRPr lang="en-US" sz="750" dirty="0"/>
+            <a:endParaRPr lang="en-US" sz="1100" dirty="0"/>
           </a:p>
         </p:txBody>
       </p:sp>
@@ -3872,8 +3872,8 @@
         </p:nvSpPr>
         <p:spPr>
           <a:xfrm>
-            <a:off x="2697480" y="5684955"/>
-            <a:ext cx="347472" cy="459813"/>
+            <a:off x="2697480" y="5155097"/>
+            <a:ext cx="539496" cy="989672"/>
           </a:xfrm>
           <a:prstGeom prst="rect">
             <a:avLst/>
@@ -3904,7 +3904,7 @@
         </p:nvSpPr>
         <p:spPr>
           <a:xfrm>
-            <a:off x="2551176" y="6254496"/>
+            <a:off x="2624328" y="6254496"/>
             <a:ext cx="685800" cy="182880"/>
           </a:xfrm>
           <a:prstGeom prst="rect">
@@ -3921,7 +3921,7 @@
               <a:buNone/>
             </a:pPr>
             <a:r>
-              <a:rPr lang="en-US" sz="750" dirty="0">
+              <a:rPr lang="en-US" sz="1100" dirty="0">
                 <a:solidFill>
                   <a:srgbClr val="BBD0E5"/>
                 </a:solidFill>
@@ -3931,7 +3931,7 @@
               </a:rPr>
               <a:t>Precip</a:t>
             </a:r>
-            <a:endParaRPr lang="en-US" sz="750" dirty="0"/>
+            <a:endParaRPr lang="en-US" sz="1100" dirty="0"/>
           </a:p>
         </p:txBody>
       </p:sp>
@@ -3943,8 +3943,8 @@
         </p:nvSpPr>
         <p:spPr>
           <a:xfrm>
-            <a:off x="3657600" y="5900493"/>
-            <a:ext cx="347472" cy="244275"/>
+            <a:off x="3657600" y="5473151"/>
+            <a:ext cx="539496" cy="671617"/>
           </a:xfrm>
           <a:prstGeom prst="rect">
             <a:avLst/>
@@ -3975,7 +3975,7 @@
         </p:nvSpPr>
         <p:spPr>
           <a:xfrm>
-            <a:off x="3511296" y="6254496"/>
+            <a:off x="3584448" y="6254496"/>
             <a:ext cx="685800" cy="182880"/>
           </a:xfrm>
           <a:prstGeom prst="rect">
@@ -3992,7 +3992,7 @@
               <a:buNone/>
             </a:pPr>
             <a:r>
-              <a:rPr lang="en-US" sz="750" dirty="0">
+              <a:rPr lang="en-US" sz="1100" dirty="0">
                 <a:solidFill>
                   <a:srgbClr val="BBD0E5"/>
                 </a:solidFill>
@@ -4002,7 +4002,7 @@
               </a:rPr>
               <a:t>Temp</a:t>
             </a:r>
-            <a:endParaRPr lang="en-US" sz="750" dirty="0"/>
+            <a:endParaRPr lang="en-US" sz="1100" dirty="0"/>
           </a:p>
         </p:txBody>
       </p:sp>
@@ -9904,7 +9904,7 @@
                 <a:ea typeface="Aptos Display" pitchFamily="34" charset="-122"/>
                 <a:cs typeface="Aptos Display" pitchFamily="34" charset="-120"/>
               </a:rPr>
-              <a:t>Precipitation: interesting, but limited</a:t>
+              <a:t>Precipitation: Interesting, but limited</a:t>
             </a:r>
             <a:endParaRPr lang="en-US" sz="2700" dirty="0"/>
           </a:p>
@@ -9981,45 +9981,6 @@
       </p:sp>
       <p:sp>
         <p:nvSpPr>
-          <p:cNvPr id="5" name="Text 3"/>
-          <p:cNvSpPr/>
-          <p:nvPr/>
-        </p:nvSpPr>
-        <p:spPr>
-          <a:xfrm>
-            <a:off x="502920" y="6528816"/>
-            <a:ext cx="8229600" cy="164592"/>
-          </a:xfrm>
-          <a:prstGeom prst="rect">
-            <a:avLst/>
-          </a:prstGeom>
-          <a:noFill/>
-          <a:ln/>
-        </p:spPr>
-        <p:txBody>
-          <a:bodyPr wrap="square" lIns="0" tIns="0" rIns="0" bIns="0" rtlCol="0" anchor="ctr"/>
-          <a:lstStyle/>
-          <a:p>
-            <a:pPr marL="0" indent="0">
-              <a:buNone/>
-            </a:pPr>
-            <a:r>
-              <a:rPr lang="en-US" sz="780" dirty="0">
-                <a:solidFill>
-                  <a:srgbClr val="8792A2"/>
-                </a:solidFill>
-                <a:latin typeface="Aptos" pitchFamily="34" charset="0"/>
-                <a:ea typeface="Aptos" pitchFamily="34" charset="-122"/>
-                <a:cs typeface="Aptos" pitchFamily="34" charset="-120"/>
-              </a:rPr>
-              <a:t>Solar flares vs. Earth phenomena • exploratory lag analysis</a:t>
-            </a:r>
-            <a:endParaRPr lang="en-US" sz="780" dirty="0"/>
-          </a:p>
-        </p:txBody>
-      </p:sp>
-      <p:sp>
-        <p:nvSpPr>
           <p:cNvPr id="6" name="Text 4"/>
           <p:cNvSpPr/>
           <p:nvPr/>
@@ -10061,10 +10022,16 @@
         <p:nvGraphicFramePr>
           <p:cNvPr id="7" name="Chart 0"/>
           <p:cNvGraphicFramePr/>
-          <p:nvPr/>
+          <p:nvPr>
+            <p:extLst>
+              <p:ext uri="{D42A27DB-BD31-4B8C-83A1-F6EECF244321}">
+                <p14:modId xmlns:p14="http://schemas.microsoft.com/office/powerpoint/2010/main" val="404703200"/>
+              </p:ext>
+            </p:extLst>
+          </p:nvPr>
         </p:nvGraphicFramePr>
         <p:xfrm>
-          <a:off x="640080" y="1417320"/>
+          <a:off x="548640" y="2005054"/>
           <a:ext cx="5394960" cy="3886200"/>
         </p:xfrm>
         <a:graphic>
@@ -10120,7 +10087,7 @@
         </p:nvSpPr>
         <p:spPr>
           <a:xfrm>
-            <a:off x="6629400" y="1417320"/>
+            <a:off x="6618136" y="1730270"/>
             <a:ext cx="1938528" cy="402336"/>
           </a:xfrm>
           <a:prstGeom prst="rect">
@@ -10152,7 +10119,7 @@
         </p:nvSpPr>
         <p:spPr>
           <a:xfrm>
-            <a:off x="6675120" y="1472184"/>
+            <a:off x="6663856" y="1785134"/>
             <a:ext cx="1847088" cy="292608"/>
           </a:xfrm>
           <a:prstGeom prst="rect">
@@ -10193,7 +10160,7 @@
         </p:nvSpPr>
         <p:spPr>
           <a:xfrm>
-            <a:off x="8567928" y="1417320"/>
+            <a:off x="8556664" y="1730270"/>
             <a:ext cx="1453896" cy="402336"/>
           </a:xfrm>
           <a:prstGeom prst="rect">
@@ -10225,7 +10192,7 @@
         </p:nvSpPr>
         <p:spPr>
           <a:xfrm>
-            <a:off x="8613648" y="1472184"/>
+            <a:off x="8602384" y="1785134"/>
             <a:ext cx="1362456" cy="292608"/>
           </a:xfrm>
           <a:prstGeom prst="rect">
@@ -10266,7 +10233,7 @@
         </p:nvSpPr>
         <p:spPr>
           <a:xfrm>
-            <a:off x="10021824" y="1417320"/>
+            <a:off x="10010560" y="1730270"/>
             <a:ext cx="1453896" cy="402336"/>
           </a:xfrm>
           <a:prstGeom prst="rect">
@@ -10298,7 +10265,7 @@
         </p:nvSpPr>
         <p:spPr>
           <a:xfrm>
-            <a:off x="10067544" y="1472184"/>
+            <a:off x="10056280" y="1785134"/>
             <a:ext cx="1362456" cy="292608"/>
           </a:xfrm>
           <a:prstGeom prst="rect">
@@ -10339,7 +10306,7 @@
         </p:nvSpPr>
         <p:spPr>
           <a:xfrm>
-            <a:off x="6629400" y="1819656"/>
+            <a:off x="6618136" y="2132606"/>
             <a:ext cx="1938528" cy="402336"/>
           </a:xfrm>
           <a:prstGeom prst="rect">
@@ -10371,7 +10338,7 @@
         </p:nvSpPr>
         <p:spPr>
           <a:xfrm>
-            <a:off x="6675120" y="1874520"/>
+            <a:off x="6663856" y="2187470"/>
             <a:ext cx="1847088" cy="292608"/>
           </a:xfrm>
           <a:prstGeom prst="rect">
@@ -10412,7 +10379,7 @@
         </p:nvSpPr>
         <p:spPr>
           <a:xfrm>
-            <a:off x="8567928" y="1819656"/>
+            <a:off x="8556664" y="2132606"/>
             <a:ext cx="1453896" cy="402336"/>
           </a:xfrm>
           <a:prstGeom prst="rect">
@@ -10444,7 +10411,7 @@
         </p:nvSpPr>
         <p:spPr>
           <a:xfrm>
-            <a:off x="8613648" y="1874520"/>
+            <a:off x="8602384" y="2187470"/>
             <a:ext cx="1362456" cy="292608"/>
           </a:xfrm>
           <a:prstGeom prst="rect">
@@ -10485,7 +10452,7 @@
         </p:nvSpPr>
         <p:spPr>
           <a:xfrm>
-            <a:off x="10021824" y="1819656"/>
+            <a:off x="10010560" y="2132606"/>
             <a:ext cx="1453896" cy="402336"/>
           </a:xfrm>
           <a:prstGeom prst="rect">
@@ -10517,7 +10484,7 @@
         </p:nvSpPr>
         <p:spPr>
           <a:xfrm>
-            <a:off x="10067544" y="1874520"/>
+            <a:off x="10056280" y="2187470"/>
             <a:ext cx="1362456" cy="292608"/>
           </a:xfrm>
           <a:prstGeom prst="rect">
@@ -10558,7 +10525,7 @@
         </p:nvSpPr>
         <p:spPr>
           <a:xfrm>
-            <a:off x="6629400" y="2221992"/>
+            <a:off x="6618136" y="2534942"/>
             <a:ext cx="1938528" cy="402336"/>
           </a:xfrm>
           <a:prstGeom prst="rect">
@@ -10590,7 +10557,7 @@
         </p:nvSpPr>
         <p:spPr>
           <a:xfrm>
-            <a:off x="6675120" y="2276856"/>
+            <a:off x="6663856" y="2589806"/>
             <a:ext cx="1847088" cy="292608"/>
           </a:xfrm>
           <a:prstGeom prst="rect">
@@ -10631,7 +10598,7 @@
         </p:nvSpPr>
         <p:spPr>
           <a:xfrm>
-            <a:off x="8567928" y="2221992"/>
+            <a:off x="8556664" y="2534942"/>
             <a:ext cx="1453896" cy="402336"/>
           </a:xfrm>
           <a:prstGeom prst="rect">
@@ -10663,7 +10630,7 @@
         </p:nvSpPr>
         <p:spPr>
           <a:xfrm>
-            <a:off x="8613648" y="2276856"/>
+            <a:off x="8602384" y="2589806"/>
             <a:ext cx="1362456" cy="292608"/>
           </a:xfrm>
           <a:prstGeom prst="rect">
@@ -10704,7 +10671,7 @@
         </p:nvSpPr>
         <p:spPr>
           <a:xfrm>
-            <a:off x="10021824" y="2221992"/>
+            <a:off x="10010560" y="2534942"/>
             <a:ext cx="1453896" cy="402336"/>
           </a:xfrm>
           <a:prstGeom prst="rect">
@@ -10736,7 +10703,7 @@
         </p:nvSpPr>
         <p:spPr>
           <a:xfrm>
-            <a:off x="10067544" y="2276856"/>
+            <a:off x="10056280" y="2589806"/>
             <a:ext cx="1362456" cy="292608"/>
           </a:xfrm>
           <a:prstGeom prst="rect">
@@ -10777,7 +10744,7 @@
         </p:nvSpPr>
         <p:spPr>
           <a:xfrm>
-            <a:off x="6629400" y="2624328"/>
+            <a:off x="6618136" y="2937278"/>
             <a:ext cx="1938528" cy="402336"/>
           </a:xfrm>
           <a:prstGeom prst="rect">
@@ -10809,7 +10776,7 @@
         </p:nvSpPr>
         <p:spPr>
           <a:xfrm>
-            <a:off x="6675120" y="2679192"/>
+            <a:off x="6663856" y="2992142"/>
             <a:ext cx="1847088" cy="292608"/>
           </a:xfrm>
           <a:prstGeom prst="rect">
@@ -10850,7 +10817,7 @@
         </p:nvSpPr>
         <p:spPr>
           <a:xfrm>
-            <a:off x="8567928" y="2624328"/>
+            <a:off x="8556664" y="2937278"/>
             <a:ext cx="1453896" cy="402336"/>
           </a:xfrm>
           <a:prstGeom prst="rect">
@@ -10882,7 +10849,7 @@
         </p:nvSpPr>
         <p:spPr>
           <a:xfrm>
-            <a:off x="8613648" y="2679192"/>
+            <a:off x="8602384" y="2992142"/>
             <a:ext cx="1362456" cy="292608"/>
           </a:xfrm>
           <a:prstGeom prst="rect">
@@ -10923,7 +10890,7 @@
         </p:nvSpPr>
         <p:spPr>
           <a:xfrm>
-            <a:off x="10021824" y="2624328"/>
+            <a:off x="10010560" y="2937278"/>
             <a:ext cx="1453896" cy="402336"/>
           </a:xfrm>
           <a:prstGeom prst="rect">
@@ -10955,7 +10922,7 @@
         </p:nvSpPr>
         <p:spPr>
           <a:xfrm>
-            <a:off x="10067544" y="2679192"/>
+            <a:off x="10056280" y="2992142"/>
             <a:ext cx="1362456" cy="292608"/>
           </a:xfrm>
           <a:prstGeom prst="rect">
@@ -10996,7 +10963,7 @@
         </p:nvSpPr>
         <p:spPr>
           <a:xfrm>
-            <a:off x="6629400" y="3026664"/>
+            <a:off x="6618136" y="3339614"/>
             <a:ext cx="1938528" cy="402336"/>
           </a:xfrm>
           <a:prstGeom prst="rect">
@@ -11028,7 +10995,7 @@
         </p:nvSpPr>
         <p:spPr>
           <a:xfrm>
-            <a:off x="6675120" y="3081528"/>
+            <a:off x="6663856" y="3394478"/>
             <a:ext cx="1847088" cy="292608"/>
           </a:xfrm>
           <a:prstGeom prst="rect">
@@ -11069,7 +11036,7 @@
         </p:nvSpPr>
         <p:spPr>
           <a:xfrm>
-            <a:off x="8567928" y="3026664"/>
+            <a:off x="8556664" y="3339614"/>
             <a:ext cx="1453896" cy="402336"/>
           </a:xfrm>
           <a:prstGeom prst="rect">
@@ -11101,7 +11068,7 @@
         </p:nvSpPr>
         <p:spPr>
           <a:xfrm>
-            <a:off x="8613648" y="3081528"/>
+            <a:off x="8602384" y="3394478"/>
             <a:ext cx="1362456" cy="292608"/>
           </a:xfrm>
           <a:prstGeom prst="rect">
@@ -11142,7 +11109,7 @@
         </p:nvSpPr>
         <p:spPr>
           <a:xfrm>
-            <a:off x="10021824" y="3026664"/>
+            <a:off x="10010560" y="3339614"/>
             <a:ext cx="1453896" cy="402336"/>
           </a:xfrm>
           <a:prstGeom prst="rect">
@@ -11174,7 +11141,7 @@
         </p:nvSpPr>
         <p:spPr>
           <a:xfrm>
-            <a:off x="10067544" y="3081528"/>
+            <a:off x="10056280" y="3394478"/>
             <a:ext cx="1362456" cy="292608"/>
           </a:xfrm>
           <a:prstGeom prst="rect">
@@ -11215,7 +11182,7 @@
         </p:nvSpPr>
         <p:spPr>
           <a:xfrm>
-            <a:off x="6629400" y="3794760"/>
+            <a:off x="6675120" y="4261104"/>
             <a:ext cx="4846320" cy="1280160"/>
           </a:xfrm>
           <a:prstGeom prst="roundRect">
@@ -11249,7 +11216,7 @@
         </p:nvSpPr>
         <p:spPr>
           <a:xfrm>
-            <a:off x="6629400" y="3794760"/>
+            <a:off x="6618136" y="3910783"/>
             <a:ext cx="73152" cy="1280160"/>
           </a:xfrm>
           <a:prstGeom prst="rect">
@@ -11281,7 +11248,7 @@
         </p:nvSpPr>
         <p:spPr>
           <a:xfrm>
-            <a:off x="6830568" y="3959352"/>
+            <a:off x="6819304" y="4169664"/>
             <a:ext cx="4526280" cy="274320"/>
           </a:xfrm>
           <a:prstGeom prst="rect">
@@ -11348,152 +11315,6 @@
                 <a:cs typeface="Aptos" pitchFamily="34" charset="-120"/>
               </a:rPr>
               <a:t>Weather data are autocorrelated: adjacent days are not independent. FDR controls multiple tests, but not the full time-series structure.</a:t>
-            </a:r>
-            <a:endParaRPr lang="en-US" sz="1070" dirty="0"/>
-          </a:p>
-        </p:txBody>
-      </p:sp>
-      <p:sp>
-        <p:nvSpPr>
-          <p:cNvPr id="43" name="Shape 40"/>
-          <p:cNvSpPr/>
-          <p:nvPr/>
-        </p:nvSpPr>
-        <p:spPr>
-          <a:xfrm>
-            <a:off x="640080" y="5559552"/>
-            <a:ext cx="10835640" cy="502920"/>
-          </a:xfrm>
-          <a:prstGeom prst="roundRect">
-            <a:avLst>
-              <a:gd name="adj" fmla="val 14545"/>
-            </a:avLst>
-          </a:prstGeom>
-          <a:solidFill>
-            <a:srgbClr val="FFFFFF"/>
-          </a:solidFill>
-          <a:ln w="10160">
-            <a:solidFill>
-              <a:srgbClr val="DFE7F2"/>
-            </a:solidFill>
-            <a:prstDash val="solid"/>
-          </a:ln>
-        </p:spPr>
-        <p:txBody>
-          <a:bodyPr/>
-          <a:lstStyle/>
-          <a:p>
-            <a:endParaRPr lang="en-US"/>
-          </a:p>
-        </p:txBody>
-      </p:sp>
-      <p:sp>
-        <p:nvSpPr>
-          <p:cNvPr id="44" name="Shape 41"/>
-          <p:cNvSpPr/>
-          <p:nvPr/>
-        </p:nvSpPr>
-        <p:spPr>
-          <a:xfrm>
-            <a:off x="640080" y="5559552"/>
-            <a:ext cx="73152" cy="502920"/>
-          </a:xfrm>
-          <a:prstGeom prst="rect">
-            <a:avLst/>
-          </a:prstGeom>
-          <a:solidFill>
-            <a:srgbClr val="2E7D32"/>
-          </a:solidFill>
-          <a:ln w="12700">
-            <a:solidFill>
-              <a:srgbClr val="2E7D32"/>
-            </a:solidFill>
-            <a:prstDash val="solid"/>
-          </a:ln>
-        </p:spPr>
-        <p:txBody>
-          <a:bodyPr/>
-          <a:lstStyle/>
-          <a:p>
-            <a:endParaRPr lang="en-US"/>
-          </a:p>
-        </p:txBody>
-      </p:sp>
-      <p:sp>
-        <p:nvSpPr>
-          <p:cNvPr id="45" name="Text 42"/>
-          <p:cNvSpPr/>
-          <p:nvPr/>
-        </p:nvSpPr>
-        <p:spPr>
-          <a:xfrm>
-            <a:off x="841248" y="5724144"/>
-            <a:ext cx="10515600" cy="274320"/>
-          </a:xfrm>
-          <a:prstGeom prst="rect">
-            <a:avLst/>
-          </a:prstGeom>
-          <a:noFill/>
-          <a:ln/>
-        </p:spPr>
-        <p:txBody>
-          <a:bodyPr wrap="square" lIns="0" tIns="0" rIns="0" bIns="0" rtlCol="0" anchor="ctr"/>
-          <a:lstStyle/>
-          <a:p>
-            <a:pPr marL="0" indent="0">
-              <a:buNone/>
-            </a:pPr>
-            <a:r>
-              <a:rPr lang="en-US" sz="1300" b="1" dirty="0">
-                <a:solidFill>
-                  <a:srgbClr val="0B1F33"/>
-                </a:solidFill>
-                <a:latin typeface="Aptos" pitchFamily="34" charset="0"/>
-                <a:ea typeface="Aptos" pitchFamily="34" charset="-122"/>
-                <a:cs typeface="Aptos" pitchFamily="34" charset="-120"/>
-              </a:rPr>
-              <a:t>Best statement</a:t>
-            </a:r>
-            <a:endParaRPr lang="en-US" sz="1300" dirty="0"/>
-          </a:p>
-        </p:txBody>
-      </p:sp>
-      <p:sp>
-        <p:nvSpPr>
-          <p:cNvPr id="46" name="Text 43"/>
-          <p:cNvSpPr/>
-          <p:nvPr/>
-        </p:nvSpPr>
-        <p:spPr>
-          <a:xfrm>
-            <a:off x="841248" y="6071616"/>
-            <a:ext cx="10515600" cy="0"/>
-          </a:xfrm>
-          <a:prstGeom prst="rect">
-            <a:avLst/>
-          </a:prstGeom>
-          <a:noFill/>
-          <a:ln/>
-        </p:spPr>
-        <p:txBody>
-          <a:bodyPr wrap="square" lIns="0" tIns="0" rIns="0" bIns="0" rtlCol="0" anchor="ctr">
-            <a:normAutofit fontScale="25000" lnSpcReduction="20000"/>
-          </a:bodyPr>
-          <a:lstStyle/>
-          <a:p>
-            <a:pPr marL="0" indent="0">
-              <a:buNone/>
-            </a:pPr>
-            <a:r>
-              <a:rPr lang="en-US" sz="1070" dirty="0">
-                <a:solidFill>
-                  <a:srgbClr val="111827"/>
-                </a:solidFill>
-                <a:latin typeface="Aptos" pitchFamily="34" charset="0"/>
-                <a:ea typeface="Aptos" pitchFamily="34" charset="-122"/>
-                <a:cs typeface="Aptos" pitchFamily="34" charset="-120"/>
-              </a:rPr>
-              <a:t>“A small positive association was detected between solar flare frequency and global precipitation anomalies several days later.”</a:t>
             </a:r>
             <a:endParaRPr lang="en-US" sz="1070" dirty="0"/>
           </a:p>
